--- a/public/fun/pack/pptx/weddingpro/결혼식프리미엄_45_감사·답례중심_베이비블루.pptx
+++ b/public/fun/pack/pptx/weddingpro/결혼식프리미엄_45_감사·답례중심_베이비블루.pptx
@@ -113,12 +113,12 @@
   <p:extLst>
     <p:ext uri="{521415D9-36F7-43E2-AB2F-B90AF26B5E84}">
       <p14:sectionLst xmlns:p14="http://schemas.microsoft.com/office/powerpoint/2010/main">
-        <p14:section name="시작" id="{3A0AE66D-ACD9-424D-8E11-E4642C33640B}">
+        <p14:section name="시작" id="{942DD44C-B40D-4A46-AF99-2793C0F1A7E1}">
           <p14:sldIdLst>
             <p14:sldId id="256"/>
           </p14:sldIdLst>
         </p14:section>
-        <p14:section name="본문" id="{F4DDAC2F-F0ED-425F-BFF5-11CEDF34D511}">
+        <p14:section name="본문" id="{1BB634C6-1185-45D3-97E2-B6E79E0E73EB}">
           <p14:sldIdLst>
             <p14:sldId id="257"/>
             <p14:sldId id="258"/>
@@ -127,7 +127,7 @@
             <p14:sldId id="261"/>
           </p14:sldIdLst>
         </p14:section>
-        <p14:section name="마무리" id="{27574DF2-AB65-48AC-B251-EEF4A545842A}">
+        <p14:section name="마무리" id="{8A6D9D66-B455-4D98-9875-2BEF20A20E44}">
           <p14:sldIdLst>
             <p14:sldId id="262"/>
           </p14:sldIdLst>
@@ -2850,7 +2850,7 @@
             </a:lvl1pPr>
           </a:lstStyle>
           <a:p>
-            <a:fld id="{6E4291C1-9923-4EE4-8E88-6259021A256F}" type="slidenum">
+            <a:fld id="{D4190DAA-B457-4979-9CD7-8181CA93BA69}" type="slidenum">
               <a:rPr lang="en-US"/>
               <a:t>‹#›</a:t>
             </a:fld>
@@ -4902,7 +4902,7 @@
             </a:lvl1pPr>
           </a:lstStyle>
           <a:p>
-            <a:fld id="{FF6F120B-493D-41F7-9025-47B123C6677E}" type="slidenum">
+            <a:fld id="{280C474B-4C31-49D0-9012-EC68EA45951E}" type="slidenum">
               <a:rPr lang="en-US"/>
               <a:t>‹#›</a:t>
             </a:fld>
@@ -5651,7 +5651,7 @@
             </a:lvl1pPr>
           </a:lstStyle>
           <a:p>
-            <a:fld id="{56B95B70-39D1-439E-86A8-284D1FFADF8C}" type="slidenum">
+            <a:fld id="{C868BB34-91E0-4727-9DBF-F343EF2F9F86}" type="slidenum">
               <a:rPr lang="en-US"/>
               <a:t>‹#›</a:t>
             </a:fld>
@@ -6542,7 +6542,7 @@
           <a:p>
             <a:r>
               <a:rPr lang="ko-KR"/>
-              <a:t>0000. 00. 00 · 예식장 이름</a:t>
+              <a:t>날짜 입력 · 예식장 이름</a:t>
             </a:r>
           </a:p>
         </p:txBody>
@@ -6787,7 +6787,7 @@
           <a:bodyPr/>
           <a:lstStyle/>
           <a:p>
-            <a:fld id="{66FC2BD0-9414-4773-AE02-C5933D020DB6}" type="slidenum">
+            <a:fld id="{AEB78CC9-B0C7-4DCB-9D08-A76C24B7BAD7}" type="slidenum">
               <a:rPr lang="en-US"/>
               <a:t>‹#›</a:t>
             </a:fld>
@@ -7261,7 +7261,7 @@
           <a:bodyPr/>
           <a:lstStyle/>
           <a:p>
-            <a:fld id="{A40C46A8-F1F4-4F7C-BD5C-D50FC5C114C9}" type="slidenum">
+            <a:fld id="{8E5DC431-5A3E-4DCA-AF3C-48778A71D1F7}" type="slidenum">
               <a:rPr lang="en-US"/>
               <a:t>‹#›</a:t>
             </a:fld>
@@ -7650,7 +7650,7 @@
           <a:bodyPr/>
           <a:lstStyle/>
           <a:p>
-            <a:fld id="{A05807D4-53D5-4D5B-8DDB-0CC3153CBB98}" type="slidenum">
+            <a:fld id="{C341930A-235C-4A4F-9A08-A7322DA72EEB}" type="slidenum">
               <a:rPr lang="en-US"/>
               <a:t>‹#›</a:t>
             </a:fld>
@@ -9032,7 +9032,7 @@
           <a:bodyPr/>
           <a:lstStyle/>
           <a:p>
-            <a:fld id="{AC4B05EE-F8CD-4318-9B2C-3637907803A2}" type="slidenum">
+            <a:fld id="{8C404DA8-AAF9-45F9-80A6-13D73B179073}" type="slidenum">
               <a:rPr lang="en-US"/>
               <a:t>‹#›</a:t>
             </a:fld>
@@ -9142,7 +9142,7 @@
           <a:bodyPr/>
           <a:lstStyle/>
           <a:p>
-            <a:fld id="{F22CF5D5-85A2-48D6-A910-BCA3E70AD58D}" type="slidenum">
+            <a:fld id="{ABE3FCF5-869C-45D0-AB11-1BECC180543F}" type="slidenum">
               <a:rPr lang="en-US"/>
               <a:t>‹#›</a:t>
             </a:fld>
